--- a/presentations/2026-09_進度報告/01_投影片_進度報告.pptx
+++ b/presentations/2026-09_進度報告/01_投影片_進度報告.pptx
@@ -513,7 +513,7 @@
           <a:p>
             <a:r>
               <a:rPr lang="en-US" dirty="0"/>
-              <a:t>〔0:15〕一句話介紹產品：貼上訊息，或在 Threads 標記機器人，就能拿到 AI 判定和已做出判定的查核來源。自我介紹團隊五人與指導教授；分工不逐一念。</a:t>
+              <a:t/>
             </a:r>
             <a:endParaRPr lang="en-US" dirty="0"/>
           </a:p>
@@ -601,7 +601,7 @@
           <a:p>
             <a:r>
               <a:rPr lang="en-US" dirty="0"/>
-              <a:t>〔0:35〕兩組數字並列：舊模型是換閘道前 2026-06 的成績；新模型 09-16 重跑 150 筆滿分，FN、FP 都是 0，McNemar 精確檢定 p = 0.031。但要老實講限制：150 筆對新模型已經飽和（95% CI 下限 0.976），而且兩次不是只換模型——閘道與推理強度也不同，所以下一步是擴充題庫再比。</a:t>
+              <a:t/>
             </a:r>
             <a:endParaRPr lang="en-US" dirty="0"/>
           </a:p>
@@ -689,7 +689,7 @@
           <a:p>
             <a:r>
               <a:rPr lang="en-US" dirty="0"/>
-              <a:t>〔0:35〕三個風險都準備了「壞了還能 demo」的退路，這也是模擬模式被列為必做的原因。成本：新學期 CGU 額度 USD 10，到 09-16 用了約 1.2（評測 0.94、影片配音與測試約 0.25），每次 AI 查證約 USD 0.006。本輪測試也抓到並修掉三個 bug，回歸測試都補了。</a:t>
+              <a:t/>
             </a:r>
             <a:endParaRPr lang="en-US" dirty="0"/>
           </a:p>
@@ -777,17 +777,7 @@
           <a:p>
             <a:r>
               <a:rPr lang="en-US" dirty="0"/>
-              <a:t>〔0:30〕下一輪循環從實機串接開始，完成後把新評測與測試結果填進計畫書第 6 節。
-【Q&amp;A 備用：課程九項核心能力對應】
-1 運用資工、數學、科學及工程知識：三層快取與向量相似度門檻實測校準；React、FastAPI、LLM 閘道、Threads API 整合（第 4 張）。
-2 發掘、分析及處理系統運作問題：劣構問題分析；查核報導標籤不一致 bug；AI 服務全失效後切換到新學期 CGU 金鑰（第 2 張）。
-3 設計與執行實驗、分析數據：150 筆評測、混淆矩陣與錯誤分析、新舊模型 McNemar 檢定（第 10 張）。
-4 運用適當工具與現存模組：Git／GitHub Actions、Vercel、cloudflared、CGU AIR 閘道（第 4、9 張）。
-5 規劃測試環境、執行測試與結果分析：TP-FNV-2026-01 五類 46 項；109 張票與報告週切片（第 5、9 張）。
-6 撰寫與運用設計文件：共識 → 規格 → mockup → 票 → 測試計畫書 → 影片腳本（第 3 張）。
-7 有效溝通與合作：5 人分工——廖晢勛（負責人／測試負責人）、石岱勳（介面測試）、姚睿（績效與品質數據）、張宇宏（文件與審查）、廖昱翔（影片與簡報）（第 1 張）。
-8 資訊倫理與社會責任：來源分級、「尚無查核機構證實」、隱私政策與資料刪除頁、SSRF 防護、使用者原文不送搜尋引擎（第 6 張）。
-9 永續發展（SDG）：SDG 16（具公信力的資訊查證）、SDG 9（第 2 張）。</a:t>
+              <a:t/>
             </a:r>
             <a:endParaRPr lang="en-US" dirty="0"/>
           </a:p>
@@ -875,7 +865,7 @@
           <a:p>
             <a:r>
               <a:rPr lang="en-US" dirty="0"/>
-              <a:t>〔0:40〕這個題目沒有標準答案、資料會髒、外部條件一直變，所以我們把「怎樣才算可信」本身當成需求來分析，而不是只接一個 AI API。三個數字都有來源檔：CLAUDE.md §9 的標籤不一致 bug、2026-09-15 稽核 check_before.txt、00_consensus.md §4 的三個 provider 同日失效。</a:t>
+              <a:t/>
             </a:r>
             <a:endParaRPr lang="en-US" dirty="0"/>
           </a:p>
@@ -963,7 +953,7 @@
           <a:p>
             <a:r>
               <a:rPr lang="en-US" dirty="0"/>
-              <a:t>〔0:40〕這是第二次跑完循環——2026 年上半年的第一版做出可用的 MVP，這次針對第一版暴露的問題重做，每一步都留下文件可以回溯。票數口徑：109 張票，報告週切片 A 已完成 69 張（git「實作票」批次 commit 加總 64 張，其中已含 O-14；再加 D-05、O-17～O-20 共 5 張）。</a:t>
+              <a:t/>
             </a:r>
             <a:endParaRPr lang="en-US" dirty="0"/>
           </a:p>
@@ -1051,7 +1041,7 @@
           <a:p>
             <a:r>
               <a:rPr lang="en-US" dirty="0"/>
-              <a:t>〔0:45〕網站和機器人共用同一條管線，快取先擋掉重複的問題，真的沒看過才花 AI 額度。各層延遲是 2026-09-16 實測的用戶端 p50：hash 命中 213 ms、向量命中 3.06 s、AI 未命中 8.8 s（閘道同時承受 150 筆評測流量下量得）。0.75 門檻是實測校準值，不是拍腦袋。</a:t>
+              <a:t/>
             </a:r>
             <a:endParaRPr lang="en-US" dirty="0"/>
           </a:p>
@@ -1139,7 +1129,7 @@
           <a:p>
             <a:r>
               <a:rPr lang="en-US" dirty="0"/>
-              <a:t>〔0:30〕原排程一週 152 小時做不完，我們選擇「只做影片看得到的切片」，這是循環中「修正範圍」的決策，每一項延後都有對應的票。09-16 補做了 gpt-5.4-mini 重跑評測與快取延遲量測，所以評測那張可以新舊並列。</a:t>
+              <a:t/>
             </a:r>
             <a:endParaRPr lang="en-US" dirty="0"/>
           </a:p>
@@ -1227,7 +1217,7 @@
           <a:p>
             <a:r>
               <a:rPr lang="en-US" dirty="0"/>
-              <a:t>〔0:40〕查證平台最怕引用「還沒查證」的來源，所以我們寧可說「尚無查核機構證實」，也不硬給一個看起來有來源的答案。補充（被問到再講）：128 筆已證實中 113 筆帶向量，其中 11 筆向量維度不是 1536（DEF-05），實際可參與語意命中的是 102 筆，報告後重算。</a:t>
+              <a:t/>
             </a:r>
             <a:endParaRPr lang="en-US" dirty="0"/>
           </a:p>
@@ -1315,7 +1305,7 @@
           <a:p>
             <a:r>
               <a:rPr lang="en-US" dirty="0"/>
-              <a:t>〔0:30〕影片裡的機器人是模擬模式，字幕和這張都明講；實機串接還差 Meta 端設定與發佈、錯誤處理的程式（T-12／T-13），都排在報告後。模擬回覆 205–264 ms 是三輪實測。</a:t>
+              <a:t/>
             </a:r>
             <a:endParaRPr lang="en-US" dirty="0"/>
           </a:p>
@@ -1403,7 +1393,7 @@
           <a:p>
             <a:r>
               <a:rPr lang="en-US" dirty="0"/>
-              <a:t>〔3:05〕接下來播約三分鐘的 demo 影片，請留意字幕標示的模擬模式，以及找不到查核來源時系統怎麼表態。現場時間不足或影片另交時，只播分鏡的鏡 3–8（Threads 模擬閉環到 AI 即時判讀，依分鏡約 2 分鐘）。影片正在重製，以報告當天的最新版為準。</a:t>
+              <a:t/>
             </a:r>
             <a:endParaRPr lang="en-US" dirty="0"/>
           </a:p>
@@ -1491,7 +1481,7 @@
           <a:p>
             <a:r>
               <a:rPr lang="en-US" dirty="0"/>
-              <a:t>〔0:35〕測試準則在規格階段就先訂好，不是做完才補；目前功能測試每次提交都由 CI 自動跑。誠實說明：4.2 通過準則本輪未全數達成——P0 通過 23／30；FN-4（Threads 實機錯誤處理三項未實作）、PF-2（向量命中率 65%，差 1 筆）、QA-2（評測報告欄位）未通過；OP-1、UI-1、UI-6、PF-1 未執行；時程都寫在計畫書第 6 節，審查結論建議「有條件通過」。</a:t>
+              <a:t/>
             </a:r>
             <a:endParaRPr lang="en-US" dirty="0"/>
           </a:p>

--- a/presentations/2026-09_進度報告/01_投影片_進度報告.pptx
+++ b/presentations/2026-09_進度報告/01_投影片_進度報告.pptx
@@ -4207,7 +4207,7 @@
                 <a:ea typeface="Microsoft JhengHei" pitchFamily="34" charset="-122"/>
                 <a:cs typeface="Microsoft JhengHei" pitchFamily="34" charset="-120"/>
               </a:rPr>
-              <a:t>後端跑在個人電腦＋quick tunnel</a:t>
+              <a:t>後端在免費雲端主機（Render）</a:t>
             </a:r>
             <a:endParaRPr lang="zh-TW" sz="1250" dirty="0"/>
           </a:p>
@@ -4249,7 +4249,7 @@
                 <a:ea typeface="Microsoft JhengHei" pitchFamily="34" charset="-122"/>
                 <a:cs typeface="Microsoft JhengHei" pitchFamily="34" charset="-120"/>
               </a:rPr>
-              <a:t>模擬模式可離線展示、影片預錄；結果 API 328 次請求 0 次 5xx；後端上雲報告後評估（含 Supabase）。</a:t>
+              <a:t>09-19 已上雲（Render＋Supabase）：閒置會休眠，排程每 10 分鐘喚醒；每日 AI 上限 300 次；可退回個人電腦＋tunnel；影片預錄。</a:t>
             </a:r>
             <a:endParaRPr lang="zh-TW" sz="1150" dirty="0"/>
           </a:p>
@@ -5522,7 +5522,7 @@
                 <a:ea typeface="Microsoft JhengHei" pitchFamily="34" charset="-122"/>
                 <a:cs typeface="Microsoft JhengHei" pitchFamily="34" charset="-120"/>
               </a:rPr>
-              <a:t>低信心紅燈是否降為黃燈（D-6）；後端是否移到雲端（含 Supabase 選項）；Meta App Review 與企業驗證</a:t>
+              <a:t>低信心紅燈是否降為黃燈（D-6）；免費雲端方案能否長期使用（後端已於 09-19 上雲）；Meta App Review 與企業驗證</a:t>
             </a:r>
             <a:endParaRPr lang="zh-TW" sz="1150" dirty="0"/>
           </a:p>
@@ -8375,7 +8375,7 @@
                 <a:ea typeface="Calibri" pitchFamily="34" charset="-122"/>
                 <a:cs typeface="Calibri" pitchFamily="34" charset="-120"/>
               </a:rPr>
-              <a:t>Cloudflare</a:t>
+              <a:t>Render</a:t>
             </a:r>
             <a:endParaRPr lang="zh-TW" sz="1200" dirty="0"/>
           </a:p>
@@ -8395,7 +8395,7 @@
                 <a:ea typeface="Calibri" pitchFamily="34" charset="-122"/>
                 <a:cs typeface="Calibri" pitchFamily="34" charset="-120"/>
               </a:rPr>
-              <a:t>quick tunnel</a:t>
+              <a:t>雲端主機</a:t>
             </a:r>
             <a:endParaRPr lang="zh-TW" sz="1200" dirty="0"/>
           </a:p>
@@ -8508,7 +8508,7 @@
                 <a:ea typeface="Microsoft JhengHei" pitchFamily="34" charset="-122"/>
                 <a:cs typeface="Microsoft JhengHei" pitchFamily="34" charset="-120"/>
               </a:rPr>
-              <a:t>負責人電腦</a:t>
+              <a:t>資料：Supabase</a:t>
             </a:r>
             <a:endParaRPr lang="zh-TW" sz="1400" dirty="0"/>
           </a:p>
@@ -9717,7 +9717,7 @@
                 <a:ea typeface="Consolas" pitchFamily="34" charset="-122"/>
                 <a:cs typeface="Consolas" pitchFamily="34" charset="-120"/>
               </a:rPr>
-              <a:t>.parquet</a:t>
+              <a:t>Supabase</a:t>
             </a:r>
             <a:endParaRPr lang="en-US" sz="850" dirty="0"/>
           </a:p>
@@ -13742,7 +13742,7 @@
                 <a:ea typeface="Microsoft JhengHei" pitchFamily="34" charset="-122"/>
                 <a:cs typeface="Microsoft JhengHei" pitchFamily="34" charset="-120"/>
               </a:rPr>
-              <a:t>字幕全程標示模擬模式 · 本機檔案，未內嵌於簡報</a:t>
+              <a:t>字幕全程標示模擬模式 · 線上播放：網站 /demo/demo_v0.4.0.mp4</a:t>
             </a:r>
             <a:endParaRPr lang="zh-TW" sz="1100" dirty="0"/>
           </a:p>

--- a/presentations/2026-09_進度報告/01_投影片_進度報告.pptx
+++ b/presentations/2026-09_進度報告/01_投影片_進度報告.pptx
@@ -2279,7 +2279,7 @@
                 <a:ea typeface="Microsoft JhengHei" pitchFamily="34" charset="-122"/>
                 <a:cs typeface="Microsoft JhengHei" pitchFamily="34" charset="-120"/>
               </a:rPr>
-              <a:t>廖晢勛（負責人／測試負責人）· 石岱勳（介面測試）· 姚睿（績效與品質數據）· 張宇宏（文件與審查）· 廖昱翔（影片與簡報）</a:t>
+              <a:t>廖晢勛（負責人／測試負責人）· 石岱勳（介面測試）· 姚睿（績效與品質數據）· 張宇宏（文件與審查）· 廖育翔（影片與簡報）</a:t>
             </a:r>
             <a:endParaRPr lang="zh-TW" sz="1400" dirty="0"/>
           </a:p>
@@ -2316,7 +2316,7 @@
                 <a:ea typeface="Microsoft JhengHei" pitchFamily="34" charset="-122"/>
                 <a:cs typeface="Microsoft JhengHei" pitchFamily="34" charset="-120"/>
               </a:rPr>
-              <a:t>＿＿＿＿＿＿＿＿</a:t>
+              <a:t>黃崇源</a:t>
             </a:r>
             <a:endParaRPr lang="zh-TW" sz="1400" dirty="0"/>
           </a:p>

--- a/presentations/2026-09_進度報告/01_投影片_進度報告.pptx
+++ b/presentations/2026-09_進度報告/01_投影片_進度報告.pptx
@@ -7791,7 +7791,7 @@
                 <a:ea typeface="Microsoft JhengHei" pitchFamily="34" charset="-122"/>
                 <a:cs typeface="Microsoft JhengHei" pitchFamily="34" charset="-120"/>
               </a:rPr>
-              <a:t>109 張票（primitives → screens → 後端／資料／Threads），報告週切片 A 已完成 69 張。測試計畫書 46 項、pytest 478＋前端 375、150 筆評測。</a:t>
+              <a:t>109 張票（primitives → screens → 後端／資料／Threads），報告週切片 A 已完成 69 張。測試計畫書 46 項、pytest 700＋前端 380、150 筆評測。</a:t>
             </a:r>
             <a:endParaRPr lang="zh-TW" sz="1450" dirty="0"/>
           </a:p>
@@ -14304,7 +14304,7 @@
                 <a:ea typeface="Calibri" pitchFamily="34" charset="-122"/>
                 <a:cs typeface="Calibri" pitchFamily="34" charset="-120"/>
               </a:rPr>
-              <a:t>478</a:t>
+              <a:t>700</a:t>
             </a:r>
             <a:endParaRPr lang="zh-TW" sz="2600" dirty="0"/>
           </a:p>
@@ -14346,7 +14346,7 @@
                 <a:ea typeface="Microsoft JhengHei" pitchFamily="34" charset="-122"/>
                 <a:cs typeface="Microsoft JhengHei" pitchFamily="34" charset="-120"/>
               </a:rPr>
-              <a:t>後端 pytest 全數通過（離線、零點數，執行 &lt; 60 s）</a:t>
+              <a:t>後端 pytest 全數通過（離線、零點數，執行約 1 分鐘）</a:t>
             </a:r>
             <a:endParaRPr lang="zh-TW" sz="1050" dirty="0"/>
           </a:p>
@@ -14412,7 +14412,7 @@
                 <a:ea typeface="Calibri" pitchFamily="34" charset="-122"/>
                 <a:cs typeface="Calibri" pitchFamily="34" charset="-120"/>
               </a:rPr>
-              <a:t>375</a:t>
+              <a:t>380</a:t>
             </a:r>
             <a:endParaRPr lang="zh-TW" sz="2600" dirty="0"/>
           </a:p>
@@ -14562,7 +14562,7 @@
                 <a:ea typeface="Microsoft JhengHei" pitchFamily="34" charset="-122"/>
                 <a:cs typeface="Microsoft JhengHei" pitchFamily="34" charset="-120"/>
               </a:rPr>
-              <a:t>GitHub Actions test＋frontend 兩個 job（commit ad13f2f）</a:t>
+              <a:t>GitHub Actions test＋frontend 兩個 job（commit 49be377）</a:t>
             </a:r>
             <a:endParaRPr lang="zh-TW" sz="1050" dirty="0"/>
           </a:p>
@@ -19002,7 +19002,7 @@
                 <a:ea typeface="Microsoft JhengHei" pitchFamily="34" charset="-122"/>
                 <a:cs typeface="Microsoft JhengHei" pitchFamily="34" charset="-120"/>
               </a:rPr>
-              <a:t>4.2 通過準則本輪未全數達成</a:t>
+              <a:t>4.2 通過準則：重測後仍差 3 項 P0</a:t>
             </a:r>
             <a:endParaRPr lang="zh-TW" sz="1400" dirty="0"/>
           </a:p>
@@ -19025,7 +19025,7 @@
                 <a:ea typeface="Microsoft JhengHei" pitchFamily="34" charset="-122"/>
                 <a:cs typeface="Microsoft JhengHei" pitchFamily="34" charset="-120"/>
               </a:rPr>
-              <a:t>P0 通過 23／30（含待補驗 2）。</a:t>
+              <a:t>P0 通過：第一輪 23／30 → 重測後 27／30（含待補驗 4）。</a:t>
             </a:r>
             <a:endParaRPr lang="zh-TW" sz="1400" dirty="0"/>
           </a:p>
@@ -19048,7 +19048,7 @@
                 <a:ea typeface="Microsoft JhengHei" pitchFamily="34" charset="-122"/>
                 <a:cs typeface="Microsoft JhengHei" pitchFamily="34" charset="-120"/>
               </a:rPr>
-              <a:t>未通過 3：FN-4 Threads 實機錯誤處理（429 backoff、未知 4xx 分流、兩段式發佈）未實作 → T-12／T-13，09-24～30；PF-2 向量命中率 65% 未達 70%（差 1 筆）→ 10-05 前以組員審定題組重測；QA-2 評測報告缺 provider／model／timing 欄位 → B-23。</a:t>
+              <a:t>第一輪未通過 3：FN-4（Threads 錯誤處理）與 QA-2（評測報告欄位）已修正、09-20 重測通過；PF-2 向量命中率 65% 未達 70%（差 1 筆）仍未通過——未命中句的相似度確實低於門檻，不調低門檻，10-05 前以組員審定題組重測。</a:t>
             </a:r>
             <a:endParaRPr lang="zh-TW" sz="1400" dirty="0"/>
           </a:p>
@@ -19071,7 +19071,7 @@
                 <a:ea typeface="Microsoft JhengHei" pitchFamily="34" charset="-122"/>
                 <a:cs typeface="Microsoft JhengHei" pitchFamily="34" charset="-120"/>
               </a:rPr>
-              <a:t>未執行 4：OP-1 全新 clone、UI-1 深色全套與組員勾核、UI-6 簡繁比對、PF-1 未命中量測（缺前置票）。</a:t>
+              <a:t>第一輪未執行 4：PF-1 重測通過（未命中 p50 4.86 s／p90 6.64 s）、OP-1 全新安裝 4 分 07 秒（待補驗）；UI-1 深色全套與組員勾核、UI-6 簡繁比對仍未執行。</a:t>
             </a:r>
             <a:endParaRPr lang="zh-TW" sz="1400" dirty="0"/>
           </a:p>

--- a/presentations/2026-09_進度報告/01_投影片_進度報告.pptx
+++ b/presentations/2026-09_進度報告/01_投影片_進度報告.pptx
@@ -19025,7 +19025,7 @@
                 <a:ea typeface="Microsoft JhengHei" pitchFamily="34" charset="-122"/>
                 <a:cs typeface="Microsoft JhengHei" pitchFamily="34" charset="-120"/>
               </a:rPr>
-              <a:t>P0 通過：第一輪 23／30 → 重測後 27／30（含待補驗 4）。</a:t>
+              <a:t>P0 通過：第一輪 23／30 → 重測後 27／30（含待補驗 3）。</a:t>
             </a:r>
             <a:endParaRPr lang="zh-TW" sz="1400" dirty="0"/>
           </a:p>
